--- a/deliverables/G4-WATCH_technical_briefing.pptx
+++ b/deliverables/G4-WATCH_technical_briefing.pptx
@@ -11199,6 +11199,63 @@
               <a:t>–  Two unit tests asserted the inverted behaviour, so the suite agreed with the code and both disagreed with the hypothesis. Corrected together.</a:t>
             </a:r>
           </a:p>
+          <a:p>
+            <a:pPr>
+              <a:lnSpc>
+                <a:spcPct val="105000"/>
+              </a:lnSpc>
+              <a:spcAft>
+                <a:spcPts val="800"/>
+              </a:spcAft>
+            </a:pPr>
+            <a:r>
+              <a:rPr sz="1600" b="1" i="0">
+                <a:solidFill>
+                  <a:srgbClr val="C0392B"/>
+                </a:solidFill>
+                <a:latin typeface="Calibri"/>
+              </a:rPr>
+              <a:t>▪  And the controls that verdict was measured against were the wrong ones</a:t>
+            </a:r>
+          </a:p>
+          <a:p>
+            <a:pPr lvl="1">
+              <a:lnSpc>
+                <a:spcPct val="105000"/>
+              </a:lnSpc>
+              <a:spcAft>
+                <a:spcPts val="800"/>
+              </a:spcAft>
+            </a:pPr>
+            <a:r>
+              <a:rPr sz="1250" b="0" i="0">
+                <a:solidFill>
+                  <a:srgbClr val="222A30"/>
+                </a:solidFill>
+                <a:latin typeface="Calibri"/>
+              </a:rPr>
+              <a:t>–  Control selection resolved GC ties by enumeration order, which starts at nt 1 — so 36 of 37 controls landed in the structured 5' UTR, several shared between loci. For the one locus that mattered there were 443 candidates tied at a PERFECT GC match and 374 of them inside the CDS; it was given nt 7-31. Every D.H1 verdict computed before this rests on that.</a:t>
+            </a:r>
+          </a:p>
+          <a:p>
+            <a:pPr lvl="1">
+              <a:lnSpc>
+                <a:spcPct val="105000"/>
+              </a:lnSpc>
+              <a:spcAft>
+                <a:spcPts val="800"/>
+              </a:spcAft>
+            </a:pPr>
+            <a:r>
+              <a:rPr sz="1250" b="0" i="0">
+                <a:solidFill>
+                  <a:srgbClr val="1F8A70"/>
+                </a:solidFill>
+                <a:latin typeface="Calibri"/>
+              </a:rPr>
+              <a:t>–  Re-run with 5 matched CDS controls per locus, the wrong-direction effect did not vanish — it strengthened by two orders of magnitude (control rate 0.545 -&gt; 0.287; p_fdr 9.7e-07 -&gt; 1.1e-09). The bad control had been masking it. Raw and GC-adjusted tests now agree, so the verdict no longer depends on the post-hoc rule change either.</a:t>
+            </a:r>
+          </a:p>
         </p:txBody>
       </p:sp>
       <p:sp>
@@ -11695,7 +11752,7 @@
                 </a:solidFill>
                 <a:latin typeface="Calibri"/>
               </a:rPr>
-              <a:t>–  FMDV: INSUFFICIENT_DATA. FMDV 2026: SIGNAL_OPPOSITE_DIRECTION. Every surveillance score in this deck is machinery described, not a result claimed.</a:t>
+              <a:t>–  FMDV: INSUFFICIENT_DATA. FMDV 2026: SIGNAL_OPPOSITE_DIRECTION — one locus significantly AGAINST the hypothesis, two in its favour that GC adjustment explains away. Every surveillance score in this deck is machinery described, not a result claimed.</a:t>
             </a:r>
           </a:p>
         </p:txBody>
@@ -16360,6 +16417,44 @@
               </a:spcAft>
             </a:pPr>
             <a:r>
+              <a:rPr sz="1500" b="1" i="0">
+                <a:solidFill>
+                  <a:srgbClr val="C0392B"/>
+                </a:solidFill>
+                <a:latin typeface="Calibri"/>
+              </a:rPr>
+              <a:t>▪  How the controls are chosen — the load-bearing step</a:t>
+            </a:r>
+          </a:p>
+          <a:p>
+            <a:pPr lvl="1">
+              <a:lnSpc>
+                <a:spcPct val="105000"/>
+              </a:lnSpc>
+              <a:spcAft>
+                <a:spcPts val="600"/>
+              </a:spcAft>
+            </a:pPr>
+            <a:r>
+              <a:rPr sz="1300" b="0" i="0">
+                <a:solidFill>
+                  <a:srgbClr val="222A30"/>
+                </a:solidFill>
+                <a:latin typeface="Calibri"/>
+              </a:rPr>
+              <a:t>–  5 matched controls per locus, drawn from the locus's OWN compartment (5'UTR / CDS / 3'UTR), non-overlapping, ties broken by a hash of the locus id rather than by position. Matching on GC and length alone had put 36 of 37 FMDV 2026 controls in the structured 5' UTR — ties were resolved by enumeration order, which starts at nt 1.</a:t>
+            </a:r>
+          </a:p>
+          <a:p>
+            <a:pPr>
+              <a:lnSpc>
+                <a:spcPct val="105000"/>
+              </a:lnSpc>
+              <a:spcAft>
+                <a:spcPts val="600"/>
+              </a:spcAft>
+            </a:pPr>
+            <a:r>
               <a:rPr sz="1450" b="1" i="0">
                 <a:solidFill>
                   <a:srgbClr val="222A30"/>
